--- a/public/videos/repositories/golf-course-booking/golf-course-booking-tech-preview.pptx
+++ b/public/videos/repositories/golf-course-booking/golf-course-booking-tech-preview.pptx
@@ -134,7 +134,7 @@
           <p:cNvPr id="2" name="タイトル 1">
             <a:extLst>
               <a:ext uri="{FF2B5EF4-FFF2-40B4-BE49-F238E27FC236}">
-                <a16:creationId xmlns:a16="http://schemas.microsoft.com/office/drawing/2014/main" id="{8B9894CA-97B4-5898-5EBC-3E60103BB021}"/>
+                <a16:creationId xmlns:a16="http://schemas.microsoft.com/office/drawing/2014/main" id="{79D635A6-61C8-8DFC-FFD9-61D27D60CCD7}"/>
               </a:ext>
             </a:extLst>
           </p:cNvPr>
@@ -171,7 +171,7 @@
           <p:cNvPr id="3" name="字幕 2">
             <a:extLst>
               <a:ext uri="{FF2B5EF4-FFF2-40B4-BE49-F238E27FC236}">
-                <a16:creationId xmlns:a16="http://schemas.microsoft.com/office/drawing/2014/main" id="{4B393A6B-0726-8AF1-D57A-5FD5A97EB7E7}"/>
+                <a16:creationId xmlns:a16="http://schemas.microsoft.com/office/drawing/2014/main" id="{DD664388-0992-131A-19B5-C810A2531883}"/>
               </a:ext>
             </a:extLst>
           </p:cNvPr>
@@ -241,7 +241,7 @@
           <p:cNvPr id="4" name="日付プレースホルダー 3">
             <a:extLst>
               <a:ext uri="{FF2B5EF4-FFF2-40B4-BE49-F238E27FC236}">
-                <a16:creationId xmlns:a16="http://schemas.microsoft.com/office/drawing/2014/main" id="{2181E832-13F9-2A3F-4811-6402A150F651}"/>
+                <a16:creationId xmlns:a16="http://schemas.microsoft.com/office/drawing/2014/main" id="{684CC2AA-8769-16E8-B1EB-049ED3F05F0B}"/>
               </a:ext>
             </a:extLst>
           </p:cNvPr>
@@ -257,7 +257,7 @@
           <a:bodyPr/>
           <a:lstStyle/>
           <a:p>
-            <a:fld id="{5413B440-C5A9-41A8-8B6C-F60195C9733D}" type="datetimeFigureOut">
+            <a:fld id="{F86CA076-BB8B-458B-831E-FD9C0FA9C4AA}" type="datetimeFigureOut">
               <a:rPr kumimoji="1" lang="ja-JP" altLang="en-US" smtClean="0"/>
               <a:t>2026/7/30</a:t>
             </a:fld>
@@ -270,7 +270,7 @@
           <p:cNvPr id="5" name="フッター プレースホルダー 4">
             <a:extLst>
               <a:ext uri="{FF2B5EF4-FFF2-40B4-BE49-F238E27FC236}">
-                <a16:creationId xmlns:a16="http://schemas.microsoft.com/office/drawing/2014/main" id="{59A4BFE4-0D7D-AFEF-0B56-A8BD674F7C4C}"/>
+                <a16:creationId xmlns:a16="http://schemas.microsoft.com/office/drawing/2014/main" id="{78AA05B9-6060-1CE4-B32C-EBC4A469646D}"/>
               </a:ext>
             </a:extLst>
           </p:cNvPr>
@@ -295,7 +295,7 @@
           <p:cNvPr id="6" name="スライド番号プレースホルダー 5">
             <a:extLst>
               <a:ext uri="{FF2B5EF4-FFF2-40B4-BE49-F238E27FC236}">
-                <a16:creationId xmlns:a16="http://schemas.microsoft.com/office/drawing/2014/main" id="{FEF57E2E-904F-6B1D-C4CF-47806F0E4961}"/>
+                <a16:creationId xmlns:a16="http://schemas.microsoft.com/office/drawing/2014/main" id="{C81299A0-7ED4-8EDC-48A6-C48D83B88986}"/>
               </a:ext>
             </a:extLst>
           </p:cNvPr>
@@ -311,7 +311,7 @@
           <a:bodyPr/>
           <a:lstStyle/>
           <a:p>
-            <a:fld id="{DF3C1E9D-19E9-4D47-B9E1-7DC2D5C4EAD1}" type="slidenum">
+            <a:fld id="{386D8BF3-C8CF-4A70-9A46-48C6F4FC048C}" type="slidenum">
               <a:rPr kumimoji="1" lang="ja-JP" altLang="en-US" smtClean="0"/>
               <a:t>‹#›</a:t>
             </a:fld>
@@ -322,7 +322,7 @@
     </p:spTree>
     <p:extLst>
       <p:ext uri="{BB962C8B-B14F-4D97-AF65-F5344CB8AC3E}">
-        <p14:creationId xmlns:p14="http://schemas.microsoft.com/office/powerpoint/2010/main" val="2131598255"/>
+        <p14:creationId xmlns:p14="http://schemas.microsoft.com/office/powerpoint/2010/main" val="2887633014"/>
       </p:ext>
     </p:extLst>
   </p:cSld>
@@ -354,7 +354,7 @@
           <p:cNvPr id="2" name="タイトル 1">
             <a:extLst>
               <a:ext uri="{FF2B5EF4-FFF2-40B4-BE49-F238E27FC236}">
-                <a16:creationId xmlns:a16="http://schemas.microsoft.com/office/drawing/2014/main" id="{ED9895D4-B5D6-9369-E961-81020FC553E1}"/>
+                <a16:creationId xmlns:a16="http://schemas.microsoft.com/office/drawing/2014/main" id="{8D004E4D-0CB1-0ADA-A30D-4D067B6CC252}"/>
               </a:ext>
             </a:extLst>
           </p:cNvPr>
@@ -382,7 +382,7 @@
           <p:cNvPr id="3" name="縦書きテキスト プレースホルダー 2">
             <a:extLst>
               <a:ext uri="{FF2B5EF4-FFF2-40B4-BE49-F238E27FC236}">
-                <a16:creationId xmlns:a16="http://schemas.microsoft.com/office/drawing/2014/main" id="{3B4CF209-14AB-43E0-38E9-93A77AB3B5A7}"/>
+                <a16:creationId xmlns:a16="http://schemas.microsoft.com/office/drawing/2014/main" id="{17D2F130-58DD-8DC4-C1F8-8DFA2267DBD7}"/>
               </a:ext>
             </a:extLst>
           </p:cNvPr>
@@ -471,7 +471,7 @@
           <p:cNvPr id="4" name="日付プレースホルダー 3">
             <a:extLst>
               <a:ext uri="{FF2B5EF4-FFF2-40B4-BE49-F238E27FC236}">
-                <a16:creationId xmlns:a16="http://schemas.microsoft.com/office/drawing/2014/main" id="{C09D888D-FED8-3802-D6C2-ED0BDEA82825}"/>
+                <a16:creationId xmlns:a16="http://schemas.microsoft.com/office/drawing/2014/main" id="{90E2B8B3-CBAF-E56F-2724-36BDAD5574BB}"/>
               </a:ext>
             </a:extLst>
           </p:cNvPr>
@@ -487,7 +487,7 @@
           <a:bodyPr/>
           <a:lstStyle/>
           <a:p>
-            <a:fld id="{5413B440-C5A9-41A8-8B6C-F60195C9733D}" type="datetimeFigureOut">
+            <a:fld id="{F86CA076-BB8B-458B-831E-FD9C0FA9C4AA}" type="datetimeFigureOut">
               <a:rPr kumimoji="1" lang="ja-JP" altLang="en-US" smtClean="0"/>
               <a:t>2026/7/30</a:t>
             </a:fld>
@@ -500,7 +500,7 @@
           <p:cNvPr id="5" name="フッター プレースホルダー 4">
             <a:extLst>
               <a:ext uri="{FF2B5EF4-FFF2-40B4-BE49-F238E27FC236}">
-                <a16:creationId xmlns:a16="http://schemas.microsoft.com/office/drawing/2014/main" id="{40D94350-5D52-216B-D8A3-B12716E9638D}"/>
+                <a16:creationId xmlns:a16="http://schemas.microsoft.com/office/drawing/2014/main" id="{7410FD5D-0236-F814-4977-F6FFA8393B20}"/>
               </a:ext>
             </a:extLst>
           </p:cNvPr>
@@ -525,7 +525,7 @@
           <p:cNvPr id="6" name="スライド番号プレースホルダー 5">
             <a:extLst>
               <a:ext uri="{FF2B5EF4-FFF2-40B4-BE49-F238E27FC236}">
-                <a16:creationId xmlns:a16="http://schemas.microsoft.com/office/drawing/2014/main" id="{8F2772D2-B4D3-9F79-154D-938F81225B40}"/>
+                <a16:creationId xmlns:a16="http://schemas.microsoft.com/office/drawing/2014/main" id="{52003C80-FE99-1C3A-63B8-7BFF69BEDE2F}"/>
               </a:ext>
             </a:extLst>
           </p:cNvPr>
@@ -541,7 +541,7 @@
           <a:bodyPr/>
           <a:lstStyle/>
           <a:p>
-            <a:fld id="{DF3C1E9D-19E9-4D47-B9E1-7DC2D5C4EAD1}" type="slidenum">
+            <a:fld id="{386D8BF3-C8CF-4A70-9A46-48C6F4FC048C}" type="slidenum">
               <a:rPr kumimoji="1" lang="ja-JP" altLang="en-US" smtClean="0"/>
               <a:t>‹#›</a:t>
             </a:fld>
@@ -552,7 +552,7 @@
     </p:spTree>
     <p:extLst>
       <p:ext uri="{BB962C8B-B14F-4D97-AF65-F5344CB8AC3E}">
-        <p14:creationId xmlns:p14="http://schemas.microsoft.com/office/powerpoint/2010/main" val="3455605226"/>
+        <p14:creationId xmlns:p14="http://schemas.microsoft.com/office/powerpoint/2010/main" val="1527669400"/>
       </p:ext>
     </p:extLst>
   </p:cSld>
@@ -584,7 +584,7 @@
           <p:cNvPr id="2" name="縦書きタイトル 1">
             <a:extLst>
               <a:ext uri="{FF2B5EF4-FFF2-40B4-BE49-F238E27FC236}">
-                <a16:creationId xmlns:a16="http://schemas.microsoft.com/office/drawing/2014/main" id="{FF0ABFD9-C205-7CB7-CD9D-30E940081947}"/>
+                <a16:creationId xmlns:a16="http://schemas.microsoft.com/office/drawing/2014/main" id="{9657C630-2B73-73FD-7D75-119A1890A0E3}"/>
               </a:ext>
             </a:extLst>
           </p:cNvPr>
@@ -617,7 +617,7 @@
           <p:cNvPr id="3" name="縦書きテキスト プレースホルダー 2">
             <a:extLst>
               <a:ext uri="{FF2B5EF4-FFF2-40B4-BE49-F238E27FC236}">
-                <a16:creationId xmlns:a16="http://schemas.microsoft.com/office/drawing/2014/main" id="{1DFF3279-D577-78D4-B585-E29FFB5F44FC}"/>
+                <a16:creationId xmlns:a16="http://schemas.microsoft.com/office/drawing/2014/main" id="{B1BDA6DD-888B-E49F-D3BA-B3D4620AEC80}"/>
               </a:ext>
             </a:extLst>
           </p:cNvPr>
@@ -711,7 +711,7 @@
           <p:cNvPr id="4" name="日付プレースホルダー 3">
             <a:extLst>
               <a:ext uri="{FF2B5EF4-FFF2-40B4-BE49-F238E27FC236}">
-                <a16:creationId xmlns:a16="http://schemas.microsoft.com/office/drawing/2014/main" id="{39EE4529-2399-C771-D0D0-CA965257126A}"/>
+                <a16:creationId xmlns:a16="http://schemas.microsoft.com/office/drawing/2014/main" id="{9F5674BF-5805-FF55-9B27-A15CEA574317}"/>
               </a:ext>
             </a:extLst>
           </p:cNvPr>
@@ -727,7 +727,7 @@
           <a:bodyPr/>
           <a:lstStyle/>
           <a:p>
-            <a:fld id="{5413B440-C5A9-41A8-8B6C-F60195C9733D}" type="datetimeFigureOut">
+            <a:fld id="{F86CA076-BB8B-458B-831E-FD9C0FA9C4AA}" type="datetimeFigureOut">
               <a:rPr kumimoji="1" lang="ja-JP" altLang="en-US" smtClean="0"/>
               <a:t>2026/7/30</a:t>
             </a:fld>
@@ -740,7 +740,7 @@
           <p:cNvPr id="5" name="フッター プレースホルダー 4">
             <a:extLst>
               <a:ext uri="{FF2B5EF4-FFF2-40B4-BE49-F238E27FC236}">
-                <a16:creationId xmlns:a16="http://schemas.microsoft.com/office/drawing/2014/main" id="{44413246-A5E7-4984-4B4B-F700F195E55E}"/>
+                <a16:creationId xmlns:a16="http://schemas.microsoft.com/office/drawing/2014/main" id="{0A63E894-87D3-C02E-9EB9-E8D026122E33}"/>
               </a:ext>
             </a:extLst>
           </p:cNvPr>
@@ -765,7 +765,7 @@
           <p:cNvPr id="6" name="スライド番号プレースホルダー 5">
             <a:extLst>
               <a:ext uri="{FF2B5EF4-FFF2-40B4-BE49-F238E27FC236}">
-                <a16:creationId xmlns:a16="http://schemas.microsoft.com/office/drawing/2014/main" id="{4A0C0FB3-701B-DD42-0624-D705E081303A}"/>
+                <a16:creationId xmlns:a16="http://schemas.microsoft.com/office/drawing/2014/main" id="{DEBCFBCC-15E6-7149-7919-D63961544E38}"/>
               </a:ext>
             </a:extLst>
           </p:cNvPr>
@@ -781,7 +781,7 @@
           <a:bodyPr/>
           <a:lstStyle/>
           <a:p>
-            <a:fld id="{DF3C1E9D-19E9-4D47-B9E1-7DC2D5C4EAD1}" type="slidenum">
+            <a:fld id="{386D8BF3-C8CF-4A70-9A46-48C6F4FC048C}" type="slidenum">
               <a:rPr kumimoji="1" lang="ja-JP" altLang="en-US" smtClean="0"/>
               <a:t>‹#›</a:t>
             </a:fld>
@@ -792,7 +792,7 @@
     </p:spTree>
     <p:extLst>
       <p:ext uri="{BB962C8B-B14F-4D97-AF65-F5344CB8AC3E}">
-        <p14:creationId xmlns:p14="http://schemas.microsoft.com/office/powerpoint/2010/main" val="3007984851"/>
+        <p14:creationId xmlns:p14="http://schemas.microsoft.com/office/powerpoint/2010/main" val="3546824707"/>
       </p:ext>
     </p:extLst>
   </p:cSld>
@@ -824,7 +824,7 @@
           <p:cNvPr id="2" name="タイトル 1">
             <a:extLst>
               <a:ext uri="{FF2B5EF4-FFF2-40B4-BE49-F238E27FC236}">
-                <a16:creationId xmlns:a16="http://schemas.microsoft.com/office/drawing/2014/main" id="{17DAA35F-9277-2641-779A-98602F30959E}"/>
+                <a16:creationId xmlns:a16="http://schemas.microsoft.com/office/drawing/2014/main" id="{CB4FD27C-AA19-3489-5D74-34D30EFFCE73}"/>
               </a:ext>
             </a:extLst>
           </p:cNvPr>
@@ -852,7 +852,7 @@
           <p:cNvPr id="3" name="コンテンツ プレースホルダー 2">
             <a:extLst>
               <a:ext uri="{FF2B5EF4-FFF2-40B4-BE49-F238E27FC236}">
-                <a16:creationId xmlns:a16="http://schemas.microsoft.com/office/drawing/2014/main" id="{030C1A2B-A8E2-068D-1EE4-EE2C7399C8EF}"/>
+                <a16:creationId xmlns:a16="http://schemas.microsoft.com/office/drawing/2014/main" id="{437A85D9-58C0-A505-D16A-E8074778F17A}"/>
               </a:ext>
             </a:extLst>
           </p:cNvPr>
@@ -941,7 +941,7 @@
           <p:cNvPr id="4" name="日付プレースホルダー 3">
             <a:extLst>
               <a:ext uri="{FF2B5EF4-FFF2-40B4-BE49-F238E27FC236}">
-                <a16:creationId xmlns:a16="http://schemas.microsoft.com/office/drawing/2014/main" id="{9B6BCF77-0D22-8063-20BA-978B059CEAA9}"/>
+                <a16:creationId xmlns:a16="http://schemas.microsoft.com/office/drawing/2014/main" id="{AC6D9B44-5F23-E36B-2A70-21DCE0F39385}"/>
               </a:ext>
             </a:extLst>
           </p:cNvPr>
@@ -957,7 +957,7 @@
           <a:bodyPr/>
           <a:lstStyle/>
           <a:p>
-            <a:fld id="{5413B440-C5A9-41A8-8B6C-F60195C9733D}" type="datetimeFigureOut">
+            <a:fld id="{F86CA076-BB8B-458B-831E-FD9C0FA9C4AA}" type="datetimeFigureOut">
               <a:rPr kumimoji="1" lang="ja-JP" altLang="en-US" smtClean="0"/>
               <a:t>2026/7/30</a:t>
             </a:fld>
@@ -970,7 +970,7 @@
           <p:cNvPr id="5" name="フッター プレースホルダー 4">
             <a:extLst>
               <a:ext uri="{FF2B5EF4-FFF2-40B4-BE49-F238E27FC236}">
-                <a16:creationId xmlns:a16="http://schemas.microsoft.com/office/drawing/2014/main" id="{2A934201-B99F-A76B-662C-11883F61E9DB}"/>
+                <a16:creationId xmlns:a16="http://schemas.microsoft.com/office/drawing/2014/main" id="{E1B5B0C3-5EE3-17CA-2F81-CFA8D8A33EDA}"/>
               </a:ext>
             </a:extLst>
           </p:cNvPr>
@@ -995,7 +995,7 @@
           <p:cNvPr id="6" name="スライド番号プレースホルダー 5">
             <a:extLst>
               <a:ext uri="{FF2B5EF4-FFF2-40B4-BE49-F238E27FC236}">
-                <a16:creationId xmlns:a16="http://schemas.microsoft.com/office/drawing/2014/main" id="{8F48E5E5-1FCB-CD0A-7334-89BABF88578D}"/>
+                <a16:creationId xmlns:a16="http://schemas.microsoft.com/office/drawing/2014/main" id="{5BF1D56E-03FA-6D0A-4836-A2E421F6FCBF}"/>
               </a:ext>
             </a:extLst>
           </p:cNvPr>
@@ -1011,7 +1011,7 @@
           <a:bodyPr/>
           <a:lstStyle/>
           <a:p>
-            <a:fld id="{DF3C1E9D-19E9-4D47-B9E1-7DC2D5C4EAD1}" type="slidenum">
+            <a:fld id="{386D8BF3-C8CF-4A70-9A46-48C6F4FC048C}" type="slidenum">
               <a:rPr kumimoji="1" lang="ja-JP" altLang="en-US" smtClean="0"/>
               <a:t>‹#›</a:t>
             </a:fld>
@@ -1022,7 +1022,7 @@
     </p:spTree>
     <p:extLst>
       <p:ext uri="{BB962C8B-B14F-4D97-AF65-F5344CB8AC3E}">
-        <p14:creationId xmlns:p14="http://schemas.microsoft.com/office/powerpoint/2010/main" val="2818758752"/>
+        <p14:creationId xmlns:p14="http://schemas.microsoft.com/office/powerpoint/2010/main" val="1607745192"/>
       </p:ext>
     </p:extLst>
   </p:cSld>
@@ -1054,7 +1054,7 @@
           <p:cNvPr id="2" name="タイトル 1">
             <a:extLst>
               <a:ext uri="{FF2B5EF4-FFF2-40B4-BE49-F238E27FC236}">
-                <a16:creationId xmlns:a16="http://schemas.microsoft.com/office/drawing/2014/main" id="{208F50A0-EC0C-1AAB-498D-D85F8F78EA28}"/>
+                <a16:creationId xmlns:a16="http://schemas.microsoft.com/office/drawing/2014/main" id="{F5205DEF-CC69-39DB-73F3-5B8999264D6B}"/>
               </a:ext>
             </a:extLst>
           </p:cNvPr>
@@ -1091,7 +1091,7 @@
           <p:cNvPr id="3" name="テキスト プレースホルダー 2">
             <a:extLst>
               <a:ext uri="{FF2B5EF4-FFF2-40B4-BE49-F238E27FC236}">
-                <a16:creationId xmlns:a16="http://schemas.microsoft.com/office/drawing/2014/main" id="{F11FEDBF-3C44-8453-52CF-3C309F4B412D}"/>
+                <a16:creationId xmlns:a16="http://schemas.microsoft.com/office/drawing/2014/main" id="{2B7A850D-CFD2-9110-8CE6-34D5638F0C3A}"/>
               </a:ext>
             </a:extLst>
           </p:cNvPr>
@@ -1216,7 +1216,7 @@
           <p:cNvPr id="4" name="日付プレースホルダー 3">
             <a:extLst>
               <a:ext uri="{FF2B5EF4-FFF2-40B4-BE49-F238E27FC236}">
-                <a16:creationId xmlns:a16="http://schemas.microsoft.com/office/drawing/2014/main" id="{98B6D1B9-99FA-8681-5739-5A5DB1784599}"/>
+                <a16:creationId xmlns:a16="http://schemas.microsoft.com/office/drawing/2014/main" id="{A0008036-298B-7F5B-3B9F-005774C24B7A}"/>
               </a:ext>
             </a:extLst>
           </p:cNvPr>
@@ -1232,7 +1232,7 @@
           <a:bodyPr/>
           <a:lstStyle/>
           <a:p>
-            <a:fld id="{5413B440-C5A9-41A8-8B6C-F60195C9733D}" type="datetimeFigureOut">
+            <a:fld id="{F86CA076-BB8B-458B-831E-FD9C0FA9C4AA}" type="datetimeFigureOut">
               <a:rPr kumimoji="1" lang="ja-JP" altLang="en-US" smtClean="0"/>
               <a:t>2026/7/30</a:t>
             </a:fld>
@@ -1245,7 +1245,7 @@
           <p:cNvPr id="5" name="フッター プレースホルダー 4">
             <a:extLst>
               <a:ext uri="{FF2B5EF4-FFF2-40B4-BE49-F238E27FC236}">
-                <a16:creationId xmlns:a16="http://schemas.microsoft.com/office/drawing/2014/main" id="{32B50713-FA06-5E0A-74C9-DA424BAF8243}"/>
+                <a16:creationId xmlns:a16="http://schemas.microsoft.com/office/drawing/2014/main" id="{F41D457D-3093-F7EE-A0D2-E63253084632}"/>
               </a:ext>
             </a:extLst>
           </p:cNvPr>
@@ -1270,7 +1270,7 @@
           <p:cNvPr id="6" name="スライド番号プレースホルダー 5">
             <a:extLst>
               <a:ext uri="{FF2B5EF4-FFF2-40B4-BE49-F238E27FC236}">
-                <a16:creationId xmlns:a16="http://schemas.microsoft.com/office/drawing/2014/main" id="{80BC1567-E76B-1558-C2B1-87838D9A2FE0}"/>
+                <a16:creationId xmlns:a16="http://schemas.microsoft.com/office/drawing/2014/main" id="{DD0AEBB5-C0F2-0B7D-D9EF-7BB62FB68CE4}"/>
               </a:ext>
             </a:extLst>
           </p:cNvPr>
@@ -1286,7 +1286,7 @@
           <a:bodyPr/>
           <a:lstStyle/>
           <a:p>
-            <a:fld id="{DF3C1E9D-19E9-4D47-B9E1-7DC2D5C4EAD1}" type="slidenum">
+            <a:fld id="{386D8BF3-C8CF-4A70-9A46-48C6F4FC048C}" type="slidenum">
               <a:rPr kumimoji="1" lang="ja-JP" altLang="en-US" smtClean="0"/>
               <a:t>‹#›</a:t>
             </a:fld>
@@ -1297,7 +1297,7 @@
     </p:spTree>
     <p:extLst>
       <p:ext uri="{BB962C8B-B14F-4D97-AF65-F5344CB8AC3E}">
-        <p14:creationId xmlns:p14="http://schemas.microsoft.com/office/powerpoint/2010/main" val="1447258667"/>
+        <p14:creationId xmlns:p14="http://schemas.microsoft.com/office/powerpoint/2010/main" val="3491527874"/>
       </p:ext>
     </p:extLst>
   </p:cSld>
@@ -1329,7 +1329,7 @@
           <p:cNvPr id="2" name="タイトル 1">
             <a:extLst>
               <a:ext uri="{FF2B5EF4-FFF2-40B4-BE49-F238E27FC236}">
-                <a16:creationId xmlns:a16="http://schemas.microsoft.com/office/drawing/2014/main" id="{902A06E2-89CA-B603-B3A6-F3BF1EC01DEE}"/>
+                <a16:creationId xmlns:a16="http://schemas.microsoft.com/office/drawing/2014/main" id="{D0BE75C1-E8B2-A929-490D-CA800BC2AE59}"/>
               </a:ext>
             </a:extLst>
           </p:cNvPr>
@@ -1357,7 +1357,7 @@
           <p:cNvPr id="3" name="コンテンツ プレースホルダー 2">
             <a:extLst>
               <a:ext uri="{FF2B5EF4-FFF2-40B4-BE49-F238E27FC236}">
-                <a16:creationId xmlns:a16="http://schemas.microsoft.com/office/drawing/2014/main" id="{CB37B9A2-EBB9-EB0E-E0FF-850BB973DF9B}"/>
+                <a16:creationId xmlns:a16="http://schemas.microsoft.com/office/drawing/2014/main" id="{E39E99B4-78EC-4F1E-52E8-96A803F74B03}"/>
               </a:ext>
             </a:extLst>
           </p:cNvPr>
@@ -1451,7 +1451,7 @@
           <p:cNvPr id="4" name="コンテンツ プレースホルダー 3">
             <a:extLst>
               <a:ext uri="{FF2B5EF4-FFF2-40B4-BE49-F238E27FC236}">
-                <a16:creationId xmlns:a16="http://schemas.microsoft.com/office/drawing/2014/main" id="{D9108813-F2F5-089E-C9AC-A6A85F26CDCF}"/>
+                <a16:creationId xmlns:a16="http://schemas.microsoft.com/office/drawing/2014/main" id="{75D4B0AF-4E93-C149-11EB-9C1B58CC0C10}"/>
               </a:ext>
             </a:extLst>
           </p:cNvPr>
@@ -1545,7 +1545,7 @@
           <p:cNvPr id="5" name="日付プレースホルダー 4">
             <a:extLst>
               <a:ext uri="{FF2B5EF4-FFF2-40B4-BE49-F238E27FC236}">
-                <a16:creationId xmlns:a16="http://schemas.microsoft.com/office/drawing/2014/main" id="{C6C2222B-AFFF-B1FD-AF03-9CC50373B948}"/>
+                <a16:creationId xmlns:a16="http://schemas.microsoft.com/office/drawing/2014/main" id="{450E3813-4A68-19D8-543A-571167273F29}"/>
               </a:ext>
             </a:extLst>
           </p:cNvPr>
@@ -1561,7 +1561,7 @@
           <a:bodyPr/>
           <a:lstStyle/>
           <a:p>
-            <a:fld id="{5413B440-C5A9-41A8-8B6C-F60195C9733D}" type="datetimeFigureOut">
+            <a:fld id="{F86CA076-BB8B-458B-831E-FD9C0FA9C4AA}" type="datetimeFigureOut">
               <a:rPr kumimoji="1" lang="ja-JP" altLang="en-US" smtClean="0"/>
               <a:t>2026/7/30</a:t>
             </a:fld>
@@ -1574,7 +1574,7 @@
           <p:cNvPr id="6" name="フッター プレースホルダー 5">
             <a:extLst>
               <a:ext uri="{FF2B5EF4-FFF2-40B4-BE49-F238E27FC236}">
-                <a16:creationId xmlns:a16="http://schemas.microsoft.com/office/drawing/2014/main" id="{69968AEF-7D8A-C0E7-D3D4-988968688E2D}"/>
+                <a16:creationId xmlns:a16="http://schemas.microsoft.com/office/drawing/2014/main" id="{E9126897-36DF-3F38-AD32-924B2B12C154}"/>
               </a:ext>
             </a:extLst>
           </p:cNvPr>
@@ -1599,7 +1599,7 @@
           <p:cNvPr id="7" name="スライド番号プレースホルダー 6">
             <a:extLst>
               <a:ext uri="{FF2B5EF4-FFF2-40B4-BE49-F238E27FC236}">
-                <a16:creationId xmlns:a16="http://schemas.microsoft.com/office/drawing/2014/main" id="{3AC15F78-A7B2-08CC-5908-FFF527E23308}"/>
+                <a16:creationId xmlns:a16="http://schemas.microsoft.com/office/drawing/2014/main" id="{193694E0-AF29-4C4A-E918-4BB833A05F4B}"/>
               </a:ext>
             </a:extLst>
           </p:cNvPr>
@@ -1615,7 +1615,7 @@
           <a:bodyPr/>
           <a:lstStyle/>
           <a:p>
-            <a:fld id="{DF3C1E9D-19E9-4D47-B9E1-7DC2D5C4EAD1}" type="slidenum">
+            <a:fld id="{386D8BF3-C8CF-4A70-9A46-48C6F4FC048C}" type="slidenum">
               <a:rPr kumimoji="1" lang="ja-JP" altLang="en-US" smtClean="0"/>
               <a:t>‹#›</a:t>
             </a:fld>
@@ -1626,7 +1626,7 @@
     </p:spTree>
     <p:extLst>
       <p:ext uri="{BB962C8B-B14F-4D97-AF65-F5344CB8AC3E}">
-        <p14:creationId xmlns:p14="http://schemas.microsoft.com/office/powerpoint/2010/main" val="4091065486"/>
+        <p14:creationId xmlns:p14="http://schemas.microsoft.com/office/powerpoint/2010/main" val="621739868"/>
       </p:ext>
     </p:extLst>
   </p:cSld>
@@ -1658,7 +1658,7 @@
           <p:cNvPr id="2" name="タイトル 1">
             <a:extLst>
               <a:ext uri="{FF2B5EF4-FFF2-40B4-BE49-F238E27FC236}">
-                <a16:creationId xmlns:a16="http://schemas.microsoft.com/office/drawing/2014/main" id="{E850EDE0-767D-C777-79D3-ED16EAA6A504}"/>
+                <a16:creationId xmlns:a16="http://schemas.microsoft.com/office/drawing/2014/main" id="{C1B23ECD-24F6-2AF3-EDBB-68BF25436C90}"/>
               </a:ext>
             </a:extLst>
           </p:cNvPr>
@@ -1691,7 +1691,7 @@
           <p:cNvPr id="3" name="テキスト プレースホルダー 2">
             <a:extLst>
               <a:ext uri="{FF2B5EF4-FFF2-40B4-BE49-F238E27FC236}">
-                <a16:creationId xmlns:a16="http://schemas.microsoft.com/office/drawing/2014/main" id="{23F4CA73-DB44-45A7-2B46-1B53B3FFA669}"/>
+                <a16:creationId xmlns:a16="http://schemas.microsoft.com/office/drawing/2014/main" id="{50A115C2-3F10-6600-6762-72EA447CBF68}"/>
               </a:ext>
             </a:extLst>
           </p:cNvPr>
@@ -1762,7 +1762,7 @@
           <p:cNvPr id="4" name="コンテンツ プレースホルダー 3">
             <a:extLst>
               <a:ext uri="{FF2B5EF4-FFF2-40B4-BE49-F238E27FC236}">
-                <a16:creationId xmlns:a16="http://schemas.microsoft.com/office/drawing/2014/main" id="{970A5B95-BF97-78E6-F20C-5811AFB3B6A3}"/>
+                <a16:creationId xmlns:a16="http://schemas.microsoft.com/office/drawing/2014/main" id="{93FBE3B7-BE34-359D-5F7F-6BF3618EEB78}"/>
               </a:ext>
             </a:extLst>
           </p:cNvPr>
@@ -1856,7 +1856,7 @@
           <p:cNvPr id="5" name="テキスト プレースホルダー 4">
             <a:extLst>
               <a:ext uri="{FF2B5EF4-FFF2-40B4-BE49-F238E27FC236}">
-                <a16:creationId xmlns:a16="http://schemas.microsoft.com/office/drawing/2014/main" id="{D47A7D71-0752-A7CA-63B3-0C2908428F6D}"/>
+                <a16:creationId xmlns:a16="http://schemas.microsoft.com/office/drawing/2014/main" id="{D8A56263-9215-282D-0C0B-0F9099497FEF}"/>
               </a:ext>
             </a:extLst>
           </p:cNvPr>
@@ -1927,7 +1927,7 @@
           <p:cNvPr id="6" name="コンテンツ プレースホルダー 5">
             <a:extLst>
               <a:ext uri="{FF2B5EF4-FFF2-40B4-BE49-F238E27FC236}">
-                <a16:creationId xmlns:a16="http://schemas.microsoft.com/office/drawing/2014/main" id="{A5BE7C3C-3069-BD91-1262-85ECC968363B}"/>
+                <a16:creationId xmlns:a16="http://schemas.microsoft.com/office/drawing/2014/main" id="{30161400-DDF4-F39A-8FC6-1C4356919533}"/>
               </a:ext>
             </a:extLst>
           </p:cNvPr>
@@ -2021,7 +2021,7 @@
           <p:cNvPr id="7" name="日付プレースホルダー 6">
             <a:extLst>
               <a:ext uri="{FF2B5EF4-FFF2-40B4-BE49-F238E27FC236}">
-                <a16:creationId xmlns:a16="http://schemas.microsoft.com/office/drawing/2014/main" id="{5E8DB5AA-C666-BDE9-7E4A-95EE261BC7AD}"/>
+                <a16:creationId xmlns:a16="http://schemas.microsoft.com/office/drawing/2014/main" id="{335CFF8E-A684-D908-0B70-97E71DAA78A8}"/>
               </a:ext>
             </a:extLst>
           </p:cNvPr>
@@ -2037,7 +2037,7 @@
           <a:bodyPr/>
           <a:lstStyle/>
           <a:p>
-            <a:fld id="{5413B440-C5A9-41A8-8B6C-F60195C9733D}" type="datetimeFigureOut">
+            <a:fld id="{F86CA076-BB8B-458B-831E-FD9C0FA9C4AA}" type="datetimeFigureOut">
               <a:rPr kumimoji="1" lang="ja-JP" altLang="en-US" smtClean="0"/>
               <a:t>2026/7/30</a:t>
             </a:fld>
@@ -2050,7 +2050,7 @@
           <p:cNvPr id="8" name="フッター プレースホルダー 7">
             <a:extLst>
               <a:ext uri="{FF2B5EF4-FFF2-40B4-BE49-F238E27FC236}">
-                <a16:creationId xmlns:a16="http://schemas.microsoft.com/office/drawing/2014/main" id="{216504EB-AC6D-2341-F5D5-CE114E4AA6FC}"/>
+                <a16:creationId xmlns:a16="http://schemas.microsoft.com/office/drawing/2014/main" id="{0CDC3184-7839-7BCE-2B5D-18FA38AAA7F3}"/>
               </a:ext>
             </a:extLst>
           </p:cNvPr>
@@ -2075,7 +2075,7 @@
           <p:cNvPr id="9" name="スライド番号プレースホルダー 8">
             <a:extLst>
               <a:ext uri="{FF2B5EF4-FFF2-40B4-BE49-F238E27FC236}">
-                <a16:creationId xmlns:a16="http://schemas.microsoft.com/office/drawing/2014/main" id="{F92C37D3-39A6-B486-FE11-849282AAAC5C}"/>
+                <a16:creationId xmlns:a16="http://schemas.microsoft.com/office/drawing/2014/main" id="{2176E033-4E21-B891-5F1A-67D8CF1F9D3B}"/>
               </a:ext>
             </a:extLst>
           </p:cNvPr>
@@ -2091,7 +2091,7 @@
           <a:bodyPr/>
           <a:lstStyle/>
           <a:p>
-            <a:fld id="{DF3C1E9D-19E9-4D47-B9E1-7DC2D5C4EAD1}" type="slidenum">
+            <a:fld id="{386D8BF3-C8CF-4A70-9A46-48C6F4FC048C}" type="slidenum">
               <a:rPr kumimoji="1" lang="ja-JP" altLang="en-US" smtClean="0"/>
               <a:t>‹#›</a:t>
             </a:fld>
@@ -2102,7 +2102,7 @@
     </p:spTree>
     <p:extLst>
       <p:ext uri="{BB962C8B-B14F-4D97-AF65-F5344CB8AC3E}">
-        <p14:creationId xmlns:p14="http://schemas.microsoft.com/office/powerpoint/2010/main" val="1799419711"/>
+        <p14:creationId xmlns:p14="http://schemas.microsoft.com/office/powerpoint/2010/main" val="2478527787"/>
       </p:ext>
     </p:extLst>
   </p:cSld>
@@ -2134,7 +2134,7 @@
           <p:cNvPr id="2" name="タイトル 1">
             <a:extLst>
               <a:ext uri="{FF2B5EF4-FFF2-40B4-BE49-F238E27FC236}">
-                <a16:creationId xmlns:a16="http://schemas.microsoft.com/office/drawing/2014/main" id="{602FD5AF-88B6-8E97-C4FA-FB575E709DDC}"/>
+                <a16:creationId xmlns:a16="http://schemas.microsoft.com/office/drawing/2014/main" id="{B34C8466-C812-9EED-1928-598BB5CFFFAA}"/>
               </a:ext>
             </a:extLst>
           </p:cNvPr>
@@ -2162,7 +2162,7 @@
           <p:cNvPr id="3" name="日付プレースホルダー 2">
             <a:extLst>
               <a:ext uri="{FF2B5EF4-FFF2-40B4-BE49-F238E27FC236}">
-                <a16:creationId xmlns:a16="http://schemas.microsoft.com/office/drawing/2014/main" id="{0C078DA3-12BF-1B91-B06D-7B976F8E910E}"/>
+                <a16:creationId xmlns:a16="http://schemas.microsoft.com/office/drawing/2014/main" id="{9B55E488-8987-913C-CB76-FF0FB4F6AC20}"/>
               </a:ext>
             </a:extLst>
           </p:cNvPr>
@@ -2178,7 +2178,7 @@
           <a:bodyPr/>
           <a:lstStyle/>
           <a:p>
-            <a:fld id="{5413B440-C5A9-41A8-8B6C-F60195C9733D}" type="datetimeFigureOut">
+            <a:fld id="{F86CA076-BB8B-458B-831E-FD9C0FA9C4AA}" type="datetimeFigureOut">
               <a:rPr kumimoji="1" lang="ja-JP" altLang="en-US" smtClean="0"/>
               <a:t>2026/7/30</a:t>
             </a:fld>
@@ -2191,7 +2191,7 @@
           <p:cNvPr id="4" name="フッター プレースホルダー 3">
             <a:extLst>
               <a:ext uri="{FF2B5EF4-FFF2-40B4-BE49-F238E27FC236}">
-                <a16:creationId xmlns:a16="http://schemas.microsoft.com/office/drawing/2014/main" id="{F0261A64-8323-1920-EAEA-F9A3CF1EBB4A}"/>
+                <a16:creationId xmlns:a16="http://schemas.microsoft.com/office/drawing/2014/main" id="{6D317760-8904-2BD9-2187-76D652DC8010}"/>
               </a:ext>
             </a:extLst>
           </p:cNvPr>
@@ -2216,7 +2216,7 @@
           <p:cNvPr id="5" name="スライド番号プレースホルダー 4">
             <a:extLst>
               <a:ext uri="{FF2B5EF4-FFF2-40B4-BE49-F238E27FC236}">
-                <a16:creationId xmlns:a16="http://schemas.microsoft.com/office/drawing/2014/main" id="{1F0E2CC5-D747-902B-EABE-5566F2E251DC}"/>
+                <a16:creationId xmlns:a16="http://schemas.microsoft.com/office/drawing/2014/main" id="{F0EA99EB-68EF-352D-D2A8-C0B6B2F9378A}"/>
               </a:ext>
             </a:extLst>
           </p:cNvPr>
@@ -2232,7 +2232,7 @@
           <a:bodyPr/>
           <a:lstStyle/>
           <a:p>
-            <a:fld id="{DF3C1E9D-19E9-4D47-B9E1-7DC2D5C4EAD1}" type="slidenum">
+            <a:fld id="{386D8BF3-C8CF-4A70-9A46-48C6F4FC048C}" type="slidenum">
               <a:rPr kumimoji="1" lang="ja-JP" altLang="en-US" smtClean="0"/>
               <a:t>‹#›</a:t>
             </a:fld>
@@ -2243,7 +2243,7 @@
     </p:spTree>
     <p:extLst>
       <p:ext uri="{BB962C8B-B14F-4D97-AF65-F5344CB8AC3E}">
-        <p14:creationId xmlns:p14="http://schemas.microsoft.com/office/powerpoint/2010/main" val="4209178491"/>
+        <p14:creationId xmlns:p14="http://schemas.microsoft.com/office/powerpoint/2010/main" val="3614214772"/>
       </p:ext>
     </p:extLst>
   </p:cSld>
@@ -2275,7 +2275,7 @@
           <p:cNvPr id="2" name="日付プレースホルダー 1">
             <a:extLst>
               <a:ext uri="{FF2B5EF4-FFF2-40B4-BE49-F238E27FC236}">
-                <a16:creationId xmlns:a16="http://schemas.microsoft.com/office/drawing/2014/main" id="{6BC7B382-479D-BFAF-CA44-4B5A112FB3B6}"/>
+                <a16:creationId xmlns:a16="http://schemas.microsoft.com/office/drawing/2014/main" id="{A0D3C1C9-7D71-7768-87A6-7792DE1D0373}"/>
               </a:ext>
             </a:extLst>
           </p:cNvPr>
@@ -2291,7 +2291,7 @@
           <a:bodyPr/>
           <a:lstStyle/>
           <a:p>
-            <a:fld id="{5413B440-C5A9-41A8-8B6C-F60195C9733D}" type="datetimeFigureOut">
+            <a:fld id="{F86CA076-BB8B-458B-831E-FD9C0FA9C4AA}" type="datetimeFigureOut">
               <a:rPr kumimoji="1" lang="ja-JP" altLang="en-US" smtClean="0"/>
               <a:t>2026/7/30</a:t>
             </a:fld>
@@ -2304,7 +2304,7 @@
           <p:cNvPr id="3" name="フッター プレースホルダー 2">
             <a:extLst>
               <a:ext uri="{FF2B5EF4-FFF2-40B4-BE49-F238E27FC236}">
-                <a16:creationId xmlns:a16="http://schemas.microsoft.com/office/drawing/2014/main" id="{55B19E0A-DA52-4278-C543-BF44C95536B3}"/>
+                <a16:creationId xmlns:a16="http://schemas.microsoft.com/office/drawing/2014/main" id="{CB463828-479C-0353-C7F8-D7F0D884F748}"/>
               </a:ext>
             </a:extLst>
           </p:cNvPr>
@@ -2329,7 +2329,7 @@
           <p:cNvPr id="4" name="スライド番号プレースホルダー 3">
             <a:extLst>
               <a:ext uri="{FF2B5EF4-FFF2-40B4-BE49-F238E27FC236}">
-                <a16:creationId xmlns:a16="http://schemas.microsoft.com/office/drawing/2014/main" id="{62143A97-CBF3-BC12-01D4-DD0F40EF0CE9}"/>
+                <a16:creationId xmlns:a16="http://schemas.microsoft.com/office/drawing/2014/main" id="{DD755808-EB03-1D25-67E6-C185ED31FDE5}"/>
               </a:ext>
             </a:extLst>
           </p:cNvPr>
@@ -2345,7 +2345,7 @@
           <a:bodyPr/>
           <a:lstStyle/>
           <a:p>
-            <a:fld id="{DF3C1E9D-19E9-4D47-B9E1-7DC2D5C4EAD1}" type="slidenum">
+            <a:fld id="{386D8BF3-C8CF-4A70-9A46-48C6F4FC048C}" type="slidenum">
               <a:rPr kumimoji="1" lang="ja-JP" altLang="en-US" smtClean="0"/>
               <a:t>‹#›</a:t>
             </a:fld>
@@ -2356,7 +2356,7 @@
     </p:spTree>
     <p:extLst>
       <p:ext uri="{BB962C8B-B14F-4D97-AF65-F5344CB8AC3E}">
-        <p14:creationId xmlns:p14="http://schemas.microsoft.com/office/powerpoint/2010/main" val="1682750210"/>
+        <p14:creationId xmlns:p14="http://schemas.microsoft.com/office/powerpoint/2010/main" val="4096999167"/>
       </p:ext>
     </p:extLst>
   </p:cSld>
@@ -2388,7 +2388,7 @@
           <p:cNvPr id="2" name="タイトル 1">
             <a:extLst>
               <a:ext uri="{FF2B5EF4-FFF2-40B4-BE49-F238E27FC236}">
-                <a16:creationId xmlns:a16="http://schemas.microsoft.com/office/drawing/2014/main" id="{B76472D4-0228-942A-9CA6-2A5D0BBBA3C7}"/>
+                <a16:creationId xmlns:a16="http://schemas.microsoft.com/office/drawing/2014/main" id="{2D87EC75-5DBD-81B2-9C83-3EA0ABAC713A}"/>
               </a:ext>
             </a:extLst>
           </p:cNvPr>
@@ -2425,7 +2425,7 @@
           <p:cNvPr id="3" name="コンテンツ プレースホルダー 2">
             <a:extLst>
               <a:ext uri="{FF2B5EF4-FFF2-40B4-BE49-F238E27FC236}">
-                <a16:creationId xmlns:a16="http://schemas.microsoft.com/office/drawing/2014/main" id="{2D123A5D-5EAC-EAF5-6EEF-82F9B2F5AC99}"/>
+                <a16:creationId xmlns:a16="http://schemas.microsoft.com/office/drawing/2014/main" id="{605FFAEA-376A-11B8-F453-A18C89E61262}"/>
               </a:ext>
             </a:extLst>
           </p:cNvPr>
@@ -2547,7 +2547,7 @@
           <p:cNvPr id="4" name="テキスト プレースホルダー 3">
             <a:extLst>
               <a:ext uri="{FF2B5EF4-FFF2-40B4-BE49-F238E27FC236}">
-                <a16:creationId xmlns:a16="http://schemas.microsoft.com/office/drawing/2014/main" id="{80196636-B122-EB14-4723-E3DFEB91CE2A}"/>
+                <a16:creationId xmlns:a16="http://schemas.microsoft.com/office/drawing/2014/main" id="{A90429E3-94E3-6276-F059-1FB0BA41E18F}"/>
               </a:ext>
             </a:extLst>
           </p:cNvPr>
@@ -2618,7 +2618,7 @@
           <p:cNvPr id="5" name="日付プレースホルダー 4">
             <a:extLst>
               <a:ext uri="{FF2B5EF4-FFF2-40B4-BE49-F238E27FC236}">
-                <a16:creationId xmlns:a16="http://schemas.microsoft.com/office/drawing/2014/main" id="{4FAFFFE7-7AAD-7D39-FA2C-957B4AA87FF2}"/>
+                <a16:creationId xmlns:a16="http://schemas.microsoft.com/office/drawing/2014/main" id="{BB54A1CF-D1D6-2C86-3697-5112ABF74386}"/>
               </a:ext>
             </a:extLst>
           </p:cNvPr>
@@ -2634,7 +2634,7 @@
           <a:bodyPr/>
           <a:lstStyle/>
           <a:p>
-            <a:fld id="{5413B440-C5A9-41A8-8B6C-F60195C9733D}" type="datetimeFigureOut">
+            <a:fld id="{F86CA076-BB8B-458B-831E-FD9C0FA9C4AA}" type="datetimeFigureOut">
               <a:rPr kumimoji="1" lang="ja-JP" altLang="en-US" smtClean="0"/>
               <a:t>2026/7/30</a:t>
             </a:fld>
@@ -2647,7 +2647,7 @@
           <p:cNvPr id="6" name="フッター プレースホルダー 5">
             <a:extLst>
               <a:ext uri="{FF2B5EF4-FFF2-40B4-BE49-F238E27FC236}">
-                <a16:creationId xmlns:a16="http://schemas.microsoft.com/office/drawing/2014/main" id="{5901BD11-BCF4-F4BA-8107-2258CE62B0AA}"/>
+                <a16:creationId xmlns:a16="http://schemas.microsoft.com/office/drawing/2014/main" id="{16667044-84BD-EC6D-BC4C-D3D0D77A9AAA}"/>
               </a:ext>
             </a:extLst>
           </p:cNvPr>
@@ -2672,7 +2672,7 @@
           <p:cNvPr id="7" name="スライド番号プレースホルダー 6">
             <a:extLst>
               <a:ext uri="{FF2B5EF4-FFF2-40B4-BE49-F238E27FC236}">
-                <a16:creationId xmlns:a16="http://schemas.microsoft.com/office/drawing/2014/main" id="{4E4ADE57-FCFE-13B1-0D59-62A69657F336}"/>
+                <a16:creationId xmlns:a16="http://schemas.microsoft.com/office/drawing/2014/main" id="{48F28197-08D1-62F7-F47E-1276C5A5E345}"/>
               </a:ext>
             </a:extLst>
           </p:cNvPr>
@@ -2688,7 +2688,7 @@
           <a:bodyPr/>
           <a:lstStyle/>
           <a:p>
-            <a:fld id="{DF3C1E9D-19E9-4D47-B9E1-7DC2D5C4EAD1}" type="slidenum">
+            <a:fld id="{386D8BF3-C8CF-4A70-9A46-48C6F4FC048C}" type="slidenum">
               <a:rPr kumimoji="1" lang="ja-JP" altLang="en-US" smtClean="0"/>
               <a:t>‹#›</a:t>
             </a:fld>
@@ -2699,7 +2699,7 @@
     </p:spTree>
     <p:extLst>
       <p:ext uri="{BB962C8B-B14F-4D97-AF65-F5344CB8AC3E}">
-        <p14:creationId xmlns:p14="http://schemas.microsoft.com/office/powerpoint/2010/main" val="2642800578"/>
+        <p14:creationId xmlns:p14="http://schemas.microsoft.com/office/powerpoint/2010/main" val="935151363"/>
       </p:ext>
     </p:extLst>
   </p:cSld>
@@ -2731,7 +2731,7 @@
           <p:cNvPr id="2" name="タイトル 1">
             <a:extLst>
               <a:ext uri="{FF2B5EF4-FFF2-40B4-BE49-F238E27FC236}">
-                <a16:creationId xmlns:a16="http://schemas.microsoft.com/office/drawing/2014/main" id="{08EB698A-0FAC-CF54-CAD9-4A00561D068F}"/>
+                <a16:creationId xmlns:a16="http://schemas.microsoft.com/office/drawing/2014/main" id="{360C66A9-F14E-5F86-F04D-562C2152D28A}"/>
               </a:ext>
             </a:extLst>
           </p:cNvPr>
@@ -2768,7 +2768,7 @@
           <p:cNvPr id="3" name="図プレースホルダー 2">
             <a:extLst>
               <a:ext uri="{FF2B5EF4-FFF2-40B4-BE49-F238E27FC236}">
-                <a16:creationId xmlns:a16="http://schemas.microsoft.com/office/drawing/2014/main" id="{B8AA647E-554F-A80B-EC60-382C206CE4F8}"/>
+                <a16:creationId xmlns:a16="http://schemas.microsoft.com/office/drawing/2014/main" id="{AA36EAEC-421E-9A33-5C4A-7A2F55299F1A}"/>
               </a:ext>
             </a:extLst>
           </p:cNvPr>
@@ -2835,7 +2835,7 @@
           <p:cNvPr id="4" name="テキスト プレースホルダー 3">
             <a:extLst>
               <a:ext uri="{FF2B5EF4-FFF2-40B4-BE49-F238E27FC236}">
-                <a16:creationId xmlns:a16="http://schemas.microsoft.com/office/drawing/2014/main" id="{90D825A1-F443-F6A0-B9B7-7652A9DFBB65}"/>
+                <a16:creationId xmlns:a16="http://schemas.microsoft.com/office/drawing/2014/main" id="{2416B804-6E05-15C1-82F2-8BE73CFE3B5D}"/>
               </a:ext>
             </a:extLst>
           </p:cNvPr>
@@ -2906,7 +2906,7 @@
           <p:cNvPr id="5" name="日付プレースホルダー 4">
             <a:extLst>
               <a:ext uri="{FF2B5EF4-FFF2-40B4-BE49-F238E27FC236}">
-                <a16:creationId xmlns:a16="http://schemas.microsoft.com/office/drawing/2014/main" id="{5C7CC984-0E52-BB8F-0152-4C6716D46646}"/>
+                <a16:creationId xmlns:a16="http://schemas.microsoft.com/office/drawing/2014/main" id="{C7878D95-4CC7-8B6A-57EA-3D85F6BBA3AE}"/>
               </a:ext>
             </a:extLst>
           </p:cNvPr>
@@ -2922,7 +2922,7 @@
           <a:bodyPr/>
           <a:lstStyle/>
           <a:p>
-            <a:fld id="{5413B440-C5A9-41A8-8B6C-F60195C9733D}" type="datetimeFigureOut">
+            <a:fld id="{F86CA076-BB8B-458B-831E-FD9C0FA9C4AA}" type="datetimeFigureOut">
               <a:rPr kumimoji="1" lang="ja-JP" altLang="en-US" smtClean="0"/>
               <a:t>2026/7/30</a:t>
             </a:fld>
@@ -2935,7 +2935,7 @@
           <p:cNvPr id="6" name="フッター プレースホルダー 5">
             <a:extLst>
               <a:ext uri="{FF2B5EF4-FFF2-40B4-BE49-F238E27FC236}">
-                <a16:creationId xmlns:a16="http://schemas.microsoft.com/office/drawing/2014/main" id="{F8BB8CB1-4612-A909-6D7E-8ABF73BDD315}"/>
+                <a16:creationId xmlns:a16="http://schemas.microsoft.com/office/drawing/2014/main" id="{0137202D-70C5-63B6-C5BF-8550F835DE90}"/>
               </a:ext>
             </a:extLst>
           </p:cNvPr>
@@ -2960,7 +2960,7 @@
           <p:cNvPr id="7" name="スライド番号プレースホルダー 6">
             <a:extLst>
               <a:ext uri="{FF2B5EF4-FFF2-40B4-BE49-F238E27FC236}">
-                <a16:creationId xmlns:a16="http://schemas.microsoft.com/office/drawing/2014/main" id="{E0766490-B350-95EC-469B-30EA7C207E33}"/>
+                <a16:creationId xmlns:a16="http://schemas.microsoft.com/office/drawing/2014/main" id="{C54807E1-8994-7D2D-472A-2A2CC4ADECF7}"/>
               </a:ext>
             </a:extLst>
           </p:cNvPr>
@@ -2976,7 +2976,7 @@
           <a:bodyPr/>
           <a:lstStyle/>
           <a:p>
-            <a:fld id="{DF3C1E9D-19E9-4D47-B9E1-7DC2D5C4EAD1}" type="slidenum">
+            <a:fld id="{386D8BF3-C8CF-4A70-9A46-48C6F4FC048C}" type="slidenum">
               <a:rPr kumimoji="1" lang="ja-JP" altLang="en-US" smtClean="0"/>
               <a:t>‹#›</a:t>
             </a:fld>
@@ -2987,7 +2987,7 @@
     </p:spTree>
     <p:extLst>
       <p:ext uri="{BB962C8B-B14F-4D97-AF65-F5344CB8AC3E}">
-        <p14:creationId xmlns:p14="http://schemas.microsoft.com/office/powerpoint/2010/main" val="2523708759"/>
+        <p14:creationId xmlns:p14="http://schemas.microsoft.com/office/powerpoint/2010/main" val="2197424194"/>
       </p:ext>
     </p:extLst>
   </p:cSld>
@@ -3024,7 +3024,7 @@
           <p:cNvPr id="2" name="タイトル プレースホルダー 1">
             <a:extLst>
               <a:ext uri="{FF2B5EF4-FFF2-40B4-BE49-F238E27FC236}">
-                <a16:creationId xmlns:a16="http://schemas.microsoft.com/office/drawing/2014/main" id="{A773767A-99FB-487E-BCD4-1D85F027D69C}"/>
+                <a16:creationId xmlns:a16="http://schemas.microsoft.com/office/drawing/2014/main" id="{2CFDF4A5-1273-D859-71E7-88E327AF412E}"/>
               </a:ext>
             </a:extLst>
           </p:cNvPr>
@@ -3062,7 +3062,7 @@
           <p:cNvPr id="3" name="テキスト プレースホルダー 2">
             <a:extLst>
               <a:ext uri="{FF2B5EF4-FFF2-40B4-BE49-F238E27FC236}">
-                <a16:creationId xmlns:a16="http://schemas.microsoft.com/office/drawing/2014/main" id="{29E08906-003E-826F-35B8-239401436FF0}"/>
+                <a16:creationId xmlns:a16="http://schemas.microsoft.com/office/drawing/2014/main" id="{FAB43BA6-FBED-D041-BA8B-39A42D21E097}"/>
               </a:ext>
             </a:extLst>
           </p:cNvPr>
@@ -3161,7 +3161,7 @@
           <p:cNvPr id="4" name="日付プレースホルダー 3">
             <a:extLst>
               <a:ext uri="{FF2B5EF4-FFF2-40B4-BE49-F238E27FC236}">
-                <a16:creationId xmlns:a16="http://schemas.microsoft.com/office/drawing/2014/main" id="{F4C2D2EB-7E0E-4847-C6BB-CA13CF4949EE}"/>
+                <a16:creationId xmlns:a16="http://schemas.microsoft.com/office/drawing/2014/main" id="{7CBC9870-30F7-2327-4050-582A76E0FA23}"/>
               </a:ext>
             </a:extLst>
           </p:cNvPr>
@@ -3195,7 +3195,7 @@
             </a:lvl1pPr>
           </a:lstStyle>
           <a:p>
-            <a:fld id="{5413B440-C5A9-41A8-8B6C-F60195C9733D}" type="datetimeFigureOut">
+            <a:fld id="{F86CA076-BB8B-458B-831E-FD9C0FA9C4AA}" type="datetimeFigureOut">
               <a:rPr kumimoji="1" lang="ja-JP" altLang="en-US" smtClean="0"/>
               <a:t>2026/7/30</a:t>
             </a:fld>
@@ -3208,7 +3208,7 @@
           <p:cNvPr id="5" name="フッター プレースホルダー 4">
             <a:extLst>
               <a:ext uri="{FF2B5EF4-FFF2-40B4-BE49-F238E27FC236}">
-                <a16:creationId xmlns:a16="http://schemas.microsoft.com/office/drawing/2014/main" id="{E8832EBF-1881-A210-7C50-274F6317F5EF}"/>
+                <a16:creationId xmlns:a16="http://schemas.microsoft.com/office/drawing/2014/main" id="{ACDA83B2-C982-4AAC-C436-793EBF87D51E}"/>
               </a:ext>
             </a:extLst>
           </p:cNvPr>
@@ -3251,7 +3251,7 @@
           <p:cNvPr id="6" name="スライド番号プレースホルダー 5">
             <a:extLst>
               <a:ext uri="{FF2B5EF4-FFF2-40B4-BE49-F238E27FC236}">
-                <a16:creationId xmlns:a16="http://schemas.microsoft.com/office/drawing/2014/main" id="{70D48679-EC70-13B2-0044-265C24EE58C0}"/>
+                <a16:creationId xmlns:a16="http://schemas.microsoft.com/office/drawing/2014/main" id="{5F36EF4B-5741-4E06-B7BC-AB6C88BD126B}"/>
               </a:ext>
             </a:extLst>
           </p:cNvPr>
@@ -3285,7 +3285,7 @@
             </a:lvl1pPr>
           </a:lstStyle>
           <a:p>
-            <a:fld id="{DF3C1E9D-19E9-4D47-B9E1-7DC2D5C4EAD1}" type="slidenum">
+            <a:fld id="{386D8BF3-C8CF-4A70-9A46-48C6F4FC048C}" type="slidenum">
               <a:rPr kumimoji="1" lang="ja-JP" altLang="en-US" smtClean="0"/>
               <a:t>‹#›</a:t>
             </a:fld>
@@ -3296,7 +3296,7 @@
     </p:spTree>
     <p:extLst>
       <p:ext uri="{BB962C8B-B14F-4D97-AF65-F5344CB8AC3E}">
-        <p14:creationId xmlns:p14="http://schemas.microsoft.com/office/powerpoint/2010/main" val="1354357299"/>
+        <p14:creationId xmlns:p14="http://schemas.microsoft.com/office/powerpoint/2010/main" val="2339200773"/>
       </p:ext>
     </p:extLst>
   </p:cSld>
@@ -3619,7 +3619,7 @@
           <p:cNvPr id="2" name="テキスト ボックス 1">
             <a:extLst>
               <a:ext uri="{FF2B5EF4-FFF2-40B4-BE49-F238E27FC236}">
-                <a16:creationId xmlns:a16="http://schemas.microsoft.com/office/drawing/2014/main" id="{B435421C-8639-F036-C502-0AB8E849D394}"/>
+                <a16:creationId xmlns:a16="http://schemas.microsoft.com/office/drawing/2014/main" id="{2AA1F3ED-1DDF-3E87-B94D-A1C7314CD837}"/>
               </a:ext>
             </a:extLst>
           </p:cNvPr>
@@ -3665,7 +3665,7 @@
           <p:cNvPr id="3" name="テキスト ボックス 2">
             <a:extLst>
               <a:ext uri="{FF2B5EF4-FFF2-40B4-BE49-F238E27FC236}">
-                <a16:creationId xmlns:a16="http://schemas.microsoft.com/office/drawing/2014/main" id="{C82C125A-A880-96E8-EE57-61470BA07C2E}"/>
+                <a16:creationId xmlns:a16="http://schemas.microsoft.com/office/drawing/2014/main" id="{5E8A7F9B-651C-B152-DEEC-0DEEC2510845}"/>
               </a:ext>
             </a:extLst>
           </p:cNvPr>
@@ -3714,7 +3714,7 @@
           <p:cNvPr id="4" name="テキスト ボックス 3">
             <a:extLst>
               <a:ext uri="{FF2B5EF4-FFF2-40B4-BE49-F238E27FC236}">
-                <a16:creationId xmlns:a16="http://schemas.microsoft.com/office/drawing/2014/main" id="{A03FB49B-6B62-A40B-4E63-CD4A2A805E4F}"/>
+                <a16:creationId xmlns:a16="http://schemas.microsoft.com/office/drawing/2014/main" id="{731D561B-7845-E9B1-CEBA-B2B908058328}"/>
               </a:ext>
             </a:extLst>
           </p:cNvPr>
@@ -3754,7 +3754,7 @@
           <p:cNvPr id="5" name="テキスト ボックス 4">
             <a:extLst>
               <a:ext uri="{FF2B5EF4-FFF2-40B4-BE49-F238E27FC236}">
-                <a16:creationId xmlns:a16="http://schemas.microsoft.com/office/drawing/2014/main" id="{AB91706F-64D6-27F1-2319-F5702C8A3854}"/>
+                <a16:creationId xmlns:a16="http://schemas.microsoft.com/office/drawing/2014/main" id="{C5F552B8-E754-9AF9-929D-60970B3F03C1}"/>
               </a:ext>
             </a:extLst>
           </p:cNvPr>
@@ -3801,7 +3801,7 @@
             <a:hlinkClick r:id="" action="ppaction://media"/>
             <a:extLst>
               <a:ext uri="{FF2B5EF4-FFF2-40B4-BE49-F238E27FC236}">
-                <a16:creationId xmlns:a16="http://schemas.microsoft.com/office/drawing/2014/main" id="{F9A582BC-8D46-1E31-F574-CAA7B5CA5A24}"/>
+                <a16:creationId xmlns:a16="http://schemas.microsoft.com/office/drawing/2014/main" id="{BD849F16-6773-1DC9-BD47-088D4606D945}"/>
               </a:ext>
             </a:extLst>
           </p:cNvPr>
@@ -3836,7 +3836,7 @@
     </p:spTree>
     <p:extLst>
       <p:ext uri="{BB962C8B-B14F-4D97-AF65-F5344CB8AC3E}">
-        <p14:creationId xmlns:p14="http://schemas.microsoft.com/office/powerpoint/2010/main" val="1138701432"/>
+        <p14:creationId xmlns:p14="http://schemas.microsoft.com/office/powerpoint/2010/main" val="1303083275"/>
       </p:ext>
     </p:extLst>
   </p:cSld>
@@ -3960,7 +3960,7 @@
           <p:cNvPr id="2" name="テキスト ボックス 1">
             <a:extLst>
               <a:ext uri="{FF2B5EF4-FFF2-40B4-BE49-F238E27FC236}">
-                <a16:creationId xmlns:a16="http://schemas.microsoft.com/office/drawing/2014/main" id="{D9B1E56C-6100-AC85-79D8-8357D86C1E5D}"/>
+                <a16:creationId xmlns:a16="http://schemas.microsoft.com/office/drawing/2014/main" id="{4CBD2B83-D117-656C-D872-03E8DCEB48A2}"/>
               </a:ext>
             </a:extLst>
           </p:cNvPr>
@@ -4006,7 +4006,7 @@
           <p:cNvPr id="3" name="テキスト ボックス 2">
             <a:extLst>
               <a:ext uri="{FF2B5EF4-FFF2-40B4-BE49-F238E27FC236}">
-                <a16:creationId xmlns:a16="http://schemas.microsoft.com/office/drawing/2014/main" id="{CCAE92CC-2293-2059-20D7-FA0A8466F44A}"/>
+                <a16:creationId xmlns:a16="http://schemas.microsoft.com/office/drawing/2014/main" id="{7E93A689-F08F-3D62-3A3B-12C98AB8FF0A}"/>
               </a:ext>
             </a:extLst>
           </p:cNvPr>
@@ -4046,7 +4046,7 @@
           <p:cNvPr id="4" name="テキスト ボックス 3">
             <a:extLst>
               <a:ext uri="{FF2B5EF4-FFF2-40B4-BE49-F238E27FC236}">
-                <a16:creationId xmlns:a16="http://schemas.microsoft.com/office/drawing/2014/main" id="{A8F8F8D7-499C-158A-E539-AA6B09FE8058}"/>
+                <a16:creationId xmlns:a16="http://schemas.microsoft.com/office/drawing/2014/main" id="{A9D820FF-D49A-C436-251E-176EEF6F7255}"/>
               </a:ext>
             </a:extLst>
           </p:cNvPr>
@@ -4056,7 +4056,7 @@
         <p:spPr>
           <a:xfrm>
             <a:off x="533400" y="3429000"/>
-            <a:ext cx="10795000" cy="707886"/>
+            <a:ext cx="10795000" cy="400110"/>
           </a:xfrm>
           <a:prstGeom prst="rect">
             <a:avLst/>
@@ -4076,14 +4076,17 @@
                 </a:solidFill>
                 <a:latin typeface="Arial" panose="020B0604020202020204" pitchFamily="34" charset="0"/>
               </a:rPr>
-              <a:t>Golf Course Booking Recommended repository: golf course booking Confirmed domain: golfrsv</a:t>
-            </a:r>
-            <a:endParaRPr kumimoji="1" lang="ja-JP" altLang="en-US" sz="2000">
-              <a:solidFill>
-                <a:srgbClr val="333333"/>
-              </a:solidFill>
-              <a:latin typeface="Arial" panose="020B0604020202020204" pitchFamily="34" charset="0"/>
-            </a:endParaRPr>
+              <a:t>Golf Course Booking</a:t>
+            </a:r>
+            <a:r>
+              <a:rPr kumimoji="1" lang="ja-JP" altLang="en-US" sz="2000">
+                <a:solidFill>
+                  <a:srgbClr val="333333"/>
+                </a:solidFill>
+                <a:latin typeface="Arial" panose="020B0604020202020204" pitchFamily="34" charset="0"/>
+              </a:rPr>
+              <a:t>の目的、構成、実装を公開コードから確認できるプロジェクトです。</a:t>
+            </a:r>
           </a:p>
         </p:txBody>
       </p:sp>
@@ -4092,7 +4095,7 @@
           <p:cNvPr id="5" name="テキスト ボックス 4">
             <a:extLst>
               <a:ext uri="{FF2B5EF4-FFF2-40B4-BE49-F238E27FC236}">
-                <a16:creationId xmlns:a16="http://schemas.microsoft.com/office/drawing/2014/main" id="{A831C787-1C6D-8DD2-9FAA-6B5AF66BE92E}"/>
+                <a16:creationId xmlns:a16="http://schemas.microsoft.com/office/drawing/2014/main" id="{44285B60-E883-2657-A034-CDA5256085EB}"/>
               </a:ext>
             </a:extLst>
           </p:cNvPr>
@@ -4139,7 +4142,7 @@
             <a:hlinkClick r:id="" action="ppaction://media"/>
             <a:extLst>
               <a:ext uri="{FF2B5EF4-FFF2-40B4-BE49-F238E27FC236}">
-                <a16:creationId xmlns:a16="http://schemas.microsoft.com/office/drawing/2014/main" id="{20EA41BA-3D74-87E4-6524-6AB24F34AEB8}"/>
+                <a16:creationId xmlns:a16="http://schemas.microsoft.com/office/drawing/2014/main" id="{6218B0D7-4EEA-4A87-7EAA-2B0471B8AC34}"/>
               </a:ext>
             </a:extLst>
           </p:cNvPr>
@@ -4174,7 +4177,7 @@
     </p:spTree>
     <p:extLst>
       <p:ext uri="{BB962C8B-B14F-4D97-AF65-F5344CB8AC3E}">
-        <p14:creationId xmlns:p14="http://schemas.microsoft.com/office/powerpoint/2010/main" val="2109891854"/>
+        <p14:creationId xmlns:p14="http://schemas.microsoft.com/office/powerpoint/2010/main" val="4285447136"/>
       </p:ext>
     </p:extLst>
   </p:cSld>
@@ -4217,7 +4220,7 @@
                                   <p:childTnLst>
                                     <p:cmd type="call" cmd="playFrom(0.0)">
                                       <p:cBhvr>
-                                        <p:cTn id="6" dur="7856" fill="hold"/>
+                                        <p:cTn id="6" dur="7551" fill="hold"/>
                                         <p:tgtEl>
                                           <p:spTgt spid="6"/>
                                         </p:tgtEl>
@@ -4298,7 +4301,7 @@
           <p:cNvPr id="2" name="テキスト ボックス 1">
             <a:extLst>
               <a:ext uri="{FF2B5EF4-FFF2-40B4-BE49-F238E27FC236}">
-                <a16:creationId xmlns:a16="http://schemas.microsoft.com/office/drawing/2014/main" id="{A7F54922-491A-C6E3-C060-1CCC5BF53D34}"/>
+                <a16:creationId xmlns:a16="http://schemas.microsoft.com/office/drawing/2014/main" id="{320B74A3-44BB-D786-35F9-46C2AA453180}"/>
               </a:ext>
             </a:extLst>
           </p:cNvPr>
@@ -4344,7 +4347,7 @@
           <p:cNvPr id="3" name="テキスト ボックス 2">
             <a:extLst>
               <a:ext uri="{FF2B5EF4-FFF2-40B4-BE49-F238E27FC236}">
-                <a16:creationId xmlns:a16="http://schemas.microsoft.com/office/drawing/2014/main" id="{C2F5DFB9-7998-7414-AC21-514DE26E8247}"/>
+                <a16:creationId xmlns:a16="http://schemas.microsoft.com/office/drawing/2014/main" id="{99431A8D-F8F6-C89D-3190-47108986BFA8}"/>
               </a:ext>
             </a:extLst>
           </p:cNvPr>
@@ -4384,7 +4387,7 @@
           <p:cNvPr id="4" name="テキスト ボックス 3">
             <a:extLst>
               <a:ext uri="{FF2B5EF4-FFF2-40B4-BE49-F238E27FC236}">
-                <a16:creationId xmlns:a16="http://schemas.microsoft.com/office/drawing/2014/main" id="{4AEEE7F8-AF23-2F71-B384-801D571D4F74}"/>
+                <a16:creationId xmlns:a16="http://schemas.microsoft.com/office/drawing/2014/main" id="{A555E287-3EE6-44FA-9735-E0463F56C7D0}"/>
               </a:ext>
             </a:extLst>
           </p:cNvPr>
@@ -4479,7 +4482,7 @@
           <p:cNvPr id="5" name="テキスト ボックス 4">
             <a:extLst>
               <a:ext uri="{FF2B5EF4-FFF2-40B4-BE49-F238E27FC236}">
-                <a16:creationId xmlns:a16="http://schemas.microsoft.com/office/drawing/2014/main" id="{2E509A97-1DA2-F352-7FCE-D23684428919}"/>
+                <a16:creationId xmlns:a16="http://schemas.microsoft.com/office/drawing/2014/main" id="{AC4ABFF7-F74D-04BE-CCCA-07487B19DD80}"/>
               </a:ext>
             </a:extLst>
           </p:cNvPr>
@@ -4526,7 +4529,7 @@
             <a:hlinkClick r:id="" action="ppaction://media"/>
             <a:extLst>
               <a:ext uri="{FF2B5EF4-FFF2-40B4-BE49-F238E27FC236}">
-                <a16:creationId xmlns:a16="http://schemas.microsoft.com/office/drawing/2014/main" id="{FD75399C-C9B8-9D62-C9A1-02F6D7726032}"/>
+                <a16:creationId xmlns:a16="http://schemas.microsoft.com/office/drawing/2014/main" id="{1AF29CF3-C350-DD15-D63F-C277F3FDB03E}"/>
               </a:ext>
             </a:extLst>
           </p:cNvPr>
@@ -4561,7 +4564,7 @@
     </p:spTree>
     <p:extLst>
       <p:ext uri="{BB962C8B-B14F-4D97-AF65-F5344CB8AC3E}">
-        <p14:creationId xmlns:p14="http://schemas.microsoft.com/office/powerpoint/2010/main" val="2442947718"/>
+        <p14:creationId xmlns:p14="http://schemas.microsoft.com/office/powerpoint/2010/main" val="969137459"/>
       </p:ext>
     </p:extLst>
   </p:cSld>
@@ -4685,7 +4688,7 @@
           <p:cNvPr id="2" name="テキスト ボックス 1">
             <a:extLst>
               <a:ext uri="{FF2B5EF4-FFF2-40B4-BE49-F238E27FC236}">
-                <a16:creationId xmlns:a16="http://schemas.microsoft.com/office/drawing/2014/main" id="{23A739F6-34FD-6B91-1248-245EC352BA5F}"/>
+                <a16:creationId xmlns:a16="http://schemas.microsoft.com/office/drawing/2014/main" id="{98A4BD06-29DF-88B2-BCFB-651657C88150}"/>
               </a:ext>
             </a:extLst>
           </p:cNvPr>
@@ -4731,7 +4734,7 @@
           <p:cNvPr id="3" name="テキスト ボックス 2">
             <a:extLst>
               <a:ext uri="{FF2B5EF4-FFF2-40B4-BE49-F238E27FC236}">
-                <a16:creationId xmlns:a16="http://schemas.microsoft.com/office/drawing/2014/main" id="{13B987E9-F9BA-EC9B-8304-F907A84D02B2}"/>
+                <a16:creationId xmlns:a16="http://schemas.microsoft.com/office/drawing/2014/main" id="{E48C0494-76AB-D6E7-E77B-A5BAFEADBCEF}"/>
               </a:ext>
             </a:extLst>
           </p:cNvPr>
@@ -4771,7 +4774,7 @@
           <p:cNvPr id="4" name="テキスト ボックス 3">
             <a:extLst>
               <a:ext uri="{FF2B5EF4-FFF2-40B4-BE49-F238E27FC236}">
-                <a16:creationId xmlns:a16="http://schemas.microsoft.com/office/drawing/2014/main" id="{1BB2A60E-46AE-0DDD-3628-219C38F06469}"/>
+                <a16:creationId xmlns:a16="http://schemas.microsoft.com/office/drawing/2014/main" id="{1FF103DD-56A1-D753-B583-AA47D6BC0CF8}"/>
               </a:ext>
             </a:extLst>
           </p:cNvPr>
@@ -4881,7 +4884,7 @@
           <p:cNvPr id="5" name="テキスト ボックス 4">
             <a:extLst>
               <a:ext uri="{FF2B5EF4-FFF2-40B4-BE49-F238E27FC236}">
-                <a16:creationId xmlns:a16="http://schemas.microsoft.com/office/drawing/2014/main" id="{1A0738CD-948A-4A19-3D88-CB2E3E7E7CCD}"/>
+                <a16:creationId xmlns:a16="http://schemas.microsoft.com/office/drawing/2014/main" id="{D9A69A14-40F7-1B89-065C-D5D7A622C32F}"/>
               </a:ext>
             </a:extLst>
           </p:cNvPr>
@@ -4928,7 +4931,7 @@
             <a:hlinkClick r:id="" action="ppaction://media"/>
             <a:extLst>
               <a:ext uri="{FF2B5EF4-FFF2-40B4-BE49-F238E27FC236}">
-                <a16:creationId xmlns:a16="http://schemas.microsoft.com/office/drawing/2014/main" id="{CCD2DA78-0517-C77C-EF7D-FFA3E6DBB24B}"/>
+                <a16:creationId xmlns:a16="http://schemas.microsoft.com/office/drawing/2014/main" id="{57888593-EA15-17CC-5827-CA70DA6A2756}"/>
               </a:ext>
             </a:extLst>
           </p:cNvPr>
@@ -4963,7 +4966,7 @@
     </p:spTree>
     <p:extLst>
       <p:ext uri="{BB962C8B-B14F-4D97-AF65-F5344CB8AC3E}">
-        <p14:creationId xmlns:p14="http://schemas.microsoft.com/office/powerpoint/2010/main" val="3104684541"/>
+        <p14:creationId xmlns:p14="http://schemas.microsoft.com/office/powerpoint/2010/main" val="3329615286"/>
       </p:ext>
     </p:extLst>
   </p:cSld>
@@ -5087,7 +5090,7 @@
           <p:cNvPr id="2" name="テキスト ボックス 1">
             <a:extLst>
               <a:ext uri="{FF2B5EF4-FFF2-40B4-BE49-F238E27FC236}">
-                <a16:creationId xmlns:a16="http://schemas.microsoft.com/office/drawing/2014/main" id="{B9D2E217-52D5-6CD8-B34E-1D5B32148E3E}"/>
+                <a16:creationId xmlns:a16="http://schemas.microsoft.com/office/drawing/2014/main" id="{AA1563F2-7F81-3461-9C4E-B53AD2510AFB}"/>
               </a:ext>
             </a:extLst>
           </p:cNvPr>
@@ -5133,7 +5136,7 @@
           <p:cNvPr id="3" name="テキスト ボックス 2">
             <a:extLst>
               <a:ext uri="{FF2B5EF4-FFF2-40B4-BE49-F238E27FC236}">
-                <a16:creationId xmlns:a16="http://schemas.microsoft.com/office/drawing/2014/main" id="{C0B912B6-9776-048D-7C69-AB13BF44489D}"/>
+                <a16:creationId xmlns:a16="http://schemas.microsoft.com/office/drawing/2014/main" id="{8AD5C2D6-A53C-3318-8373-C8CDC80952FB}"/>
               </a:ext>
             </a:extLst>
           </p:cNvPr>
@@ -5173,7 +5176,7 @@
           <p:cNvPr id="4" name="テキスト ボックス 3">
             <a:extLst>
               <a:ext uri="{FF2B5EF4-FFF2-40B4-BE49-F238E27FC236}">
-                <a16:creationId xmlns:a16="http://schemas.microsoft.com/office/drawing/2014/main" id="{B367CEC2-27B2-3DAD-EE4D-B37FA96FB659}"/>
+                <a16:creationId xmlns:a16="http://schemas.microsoft.com/office/drawing/2014/main" id="{C5ADBF6A-932B-C3C8-F59E-ECE0525E8E83}"/>
               </a:ext>
             </a:extLst>
           </p:cNvPr>
@@ -5197,20 +5200,14 @@
           <a:lstStyle/>
           <a:p>
             <a:r>
-              <a:rPr kumimoji="1" lang="en-US" altLang="ja-JP" sz="2000">
+              <a:rPr kumimoji="1" lang="ja-JP" altLang="en-US" sz="2000">
                 <a:solidFill>
                   <a:srgbClr val="333333"/>
                 </a:solidFill>
                 <a:latin typeface="Arial" panose="020B0604020202020204" pitchFamily="34" charset="0"/>
               </a:rPr>
-              <a:t>Set confirmed custom domain</a:t>
-            </a:r>
-            <a:endParaRPr kumimoji="1" lang="ja-JP" altLang="en-US" sz="2000">
-              <a:solidFill>
-                <a:srgbClr val="333333"/>
-              </a:solidFill>
-              <a:latin typeface="Arial" panose="020B0604020202020204" pitchFamily="34" charset="0"/>
-            </a:endParaRPr>
+              <a:t>直近のコミットでは、実装の見直しと継続的な改善が行われました。</a:t>
+            </a:r>
           </a:p>
         </p:txBody>
       </p:sp>
@@ -5219,7 +5216,7 @@
           <p:cNvPr id="5" name="テキスト ボックス 4">
             <a:extLst>
               <a:ext uri="{FF2B5EF4-FFF2-40B4-BE49-F238E27FC236}">
-                <a16:creationId xmlns:a16="http://schemas.microsoft.com/office/drawing/2014/main" id="{16C14469-2C2E-E715-90C9-2248D8A04AA5}"/>
+                <a16:creationId xmlns:a16="http://schemas.microsoft.com/office/drawing/2014/main" id="{B4534447-E3B7-FF95-A097-D8B1C04CECDF}"/>
               </a:ext>
             </a:extLst>
           </p:cNvPr>
@@ -5266,7 +5263,7 @@
             <a:hlinkClick r:id="" action="ppaction://media"/>
             <a:extLst>
               <a:ext uri="{FF2B5EF4-FFF2-40B4-BE49-F238E27FC236}">
-                <a16:creationId xmlns:a16="http://schemas.microsoft.com/office/drawing/2014/main" id="{C5240BF3-E5E2-3D72-C9F7-B9D5D5905E70}"/>
+                <a16:creationId xmlns:a16="http://schemas.microsoft.com/office/drawing/2014/main" id="{FE880D69-AD64-A17F-6F3F-B2840C1810AE}"/>
               </a:ext>
             </a:extLst>
           </p:cNvPr>
@@ -5301,7 +5298,7 @@
     </p:spTree>
     <p:extLst>
       <p:ext uri="{BB962C8B-B14F-4D97-AF65-F5344CB8AC3E}">
-        <p14:creationId xmlns:p14="http://schemas.microsoft.com/office/powerpoint/2010/main" val="1738751519"/>
+        <p14:creationId xmlns:p14="http://schemas.microsoft.com/office/powerpoint/2010/main" val="4136383707"/>
       </p:ext>
     </p:extLst>
   </p:cSld>
@@ -5344,7 +5341,7 @@
                                   <p:childTnLst>
                                     <p:cmd type="call" cmd="playFrom(0.0)">
                                       <p:cBhvr>
-                                        <p:cTn id="6" dur="6451" fill="hold"/>
+                                        <p:cTn id="6" dur="6076" fill="hold"/>
                                         <p:tgtEl>
                                           <p:spTgt spid="6"/>
                                         </p:tgtEl>
@@ -5425,7 +5422,7 @@
           <p:cNvPr id="2" name="テキスト ボックス 1">
             <a:extLst>
               <a:ext uri="{FF2B5EF4-FFF2-40B4-BE49-F238E27FC236}">
-                <a16:creationId xmlns:a16="http://schemas.microsoft.com/office/drawing/2014/main" id="{9554235B-34BE-D19C-2DE0-C2A2CECB0FED}"/>
+                <a16:creationId xmlns:a16="http://schemas.microsoft.com/office/drawing/2014/main" id="{EE546AAC-66CD-EDF1-DEC4-175EF8FED53D}"/>
               </a:ext>
             </a:extLst>
           </p:cNvPr>
@@ -5471,7 +5468,7 @@
           <p:cNvPr id="3" name="テキスト ボックス 2">
             <a:extLst>
               <a:ext uri="{FF2B5EF4-FFF2-40B4-BE49-F238E27FC236}">
-                <a16:creationId xmlns:a16="http://schemas.microsoft.com/office/drawing/2014/main" id="{E898CF8F-820F-C879-3EAB-E9AF45042824}"/>
+                <a16:creationId xmlns:a16="http://schemas.microsoft.com/office/drawing/2014/main" id="{DC4ED5E8-7BE0-3601-9FB5-4F432DF459E1}"/>
               </a:ext>
             </a:extLst>
           </p:cNvPr>
@@ -5511,7 +5508,7 @@
           <p:cNvPr id="4" name="テキスト ボックス 3">
             <a:extLst>
               <a:ext uri="{FF2B5EF4-FFF2-40B4-BE49-F238E27FC236}">
-                <a16:creationId xmlns:a16="http://schemas.microsoft.com/office/drawing/2014/main" id="{B8A2FFB5-4753-20AB-597C-3CE1197966EC}"/>
+                <a16:creationId xmlns:a16="http://schemas.microsoft.com/office/drawing/2014/main" id="{B36686F5-A937-F36C-FFAD-3C099748FAE6}"/>
               </a:ext>
             </a:extLst>
           </p:cNvPr>
@@ -5576,7 +5573,7 @@
           <p:cNvPr id="5" name="テキスト ボックス 4">
             <a:extLst>
               <a:ext uri="{FF2B5EF4-FFF2-40B4-BE49-F238E27FC236}">
-                <a16:creationId xmlns:a16="http://schemas.microsoft.com/office/drawing/2014/main" id="{4BA59AF5-6D79-1E88-5B71-1C417B344131}"/>
+                <a16:creationId xmlns:a16="http://schemas.microsoft.com/office/drawing/2014/main" id="{6261611A-FF06-151B-A398-CE34C6B9905F}"/>
               </a:ext>
             </a:extLst>
           </p:cNvPr>
@@ -5623,7 +5620,7 @@
             <a:hlinkClick r:id="" action="ppaction://media"/>
             <a:extLst>
               <a:ext uri="{FF2B5EF4-FFF2-40B4-BE49-F238E27FC236}">
-                <a16:creationId xmlns:a16="http://schemas.microsoft.com/office/drawing/2014/main" id="{A076B132-6132-A5EF-A628-1C6009EC7CE9}"/>
+                <a16:creationId xmlns:a16="http://schemas.microsoft.com/office/drawing/2014/main" id="{521FD86C-514A-4002-DACD-EBE2D74B2ADE}"/>
               </a:ext>
             </a:extLst>
           </p:cNvPr>
@@ -5658,7 +5655,7 @@
     </p:spTree>
     <p:extLst>
       <p:ext uri="{BB962C8B-B14F-4D97-AF65-F5344CB8AC3E}">
-        <p14:creationId xmlns:p14="http://schemas.microsoft.com/office/powerpoint/2010/main" val="2273707583"/>
+        <p14:creationId xmlns:p14="http://schemas.microsoft.com/office/powerpoint/2010/main" val="1283000273"/>
       </p:ext>
     </p:extLst>
   </p:cSld>
